--- a/materials/pdf/original/DS04_Folien_Modellierungswerkstatt.pptx
+++ b/materials/pdf/original/DS04_Folien_Modellierungswerkstatt.pptx
@@ -123,19 +123,19 @@
   <p:extLst>
     <p:ext uri="{521415D9-36F7-43E2-AB2F-B90AF26B5E84}">
       <p14:sectionLst xmlns:p14="http://schemas.microsoft.com/office/powerpoint/2010/main">
-        <p14:section name="Start" id="{96b56285-5ba6-5c77-1876-d6d857ebaabf}">
+        <p14:section name="Start" id="{5dc045b3-068f-f0d2-9ba7-3da635e6d7a4}">
           <p14:sldIdLst>
             <p14:sldId id="256"/>
           </p14:sldIdLst>
         </p14:section>
-        <p14:section name="Einstieg" id="{8fba8893-3378-6980-0d95-ba822225c2ac}">
+        <p14:section name="Einstieg" id="{e685ec67-0c9f-2df7-12d3-6147fcdf86ca}">
           <p14:sldIdLst>
             <p14:sldId id="257"/>
             <p14:sldId id="258"/>
             <p14:sldId id="259"/>
           </p14:sldIdLst>
         </p14:section>
-        <p14:section name="Werkstatt" id="{a655e3d0-d666-c82a-ef66-7e4049526d4c}">
+        <p14:section name="Werkstatt" id="{0ac3fc4d-b3a0-e346-7712-7eddf867d19b}">
           <p14:sldIdLst>
             <p14:sldId id="260"/>
             <p14:sldId id="261"/>
@@ -148,14 +148,14 @@
             <p14:sldId id="268"/>
           </p14:sldIdLst>
         </p14:section>
-        <p14:section name="Sicherung" id="{f786fdec-7bf6-add0-79e4-848f565ed0e9}">
+        <p14:section name="Sicherung" id="{a5d3b292-9268-1a89-8d25-ade09bac8c4c}">
           <p14:sldIdLst>
             <p14:sldId id="269"/>
             <p14:sldId id="270"/>
             <p14:sldId id="271"/>
           </p14:sldIdLst>
         </p14:section>
-        <p14:section name="Abschluss" id="{f3f570af-7440-9bb5-cc48-d1f01af4d997}">
+        <p14:section name="Abschluss" id="{cd668c8a-1236-b0dc-1053-d43aff8e9d56}">
           <p14:sldIdLst>
             <p14:sldId id="272"/>
           </p14:sldIdLst>
@@ -2299,6 +2299,45 @@
       </p:sp>
       <p:sp>
         <p:nvSpPr>
+          <p:cNvPr id="4" name="Text 1"/>
+          <p:cNvSpPr/>
+          <p:nvPr/>
+        </p:nvSpPr>
+        <p:spPr>
+          <a:xfrm>
+            <a:off x="7985455" y="6473952"/>
+            <a:ext cx="2926080" cy="274320"/>
+          </a:xfrm>
+          <a:prstGeom prst="rect">
+            <a:avLst/>
+          </a:prstGeom>
+          <a:noFill/>
+          <a:ln/>
+        </p:spPr>
+        <p:txBody>
+          <a:bodyPr wrap="square" lIns="0" tIns="0" rIns="0" bIns="0" rtlCol="0" anchor="ctr"/>
+          <a:lstStyle/>
+          <a:p>
+            <a:pPr algn="r" indent="0" marL="0">
+              <a:buNone/>
+            </a:pPr>
+            <a:r>
+              <a:rPr lang="en-US" sz="1100" dirty="0">
+                <a:solidFill>
+                  <a:srgbClr val="5B6770"/>
+                </a:solidFill>
+                <a:latin typeface="Calibri" pitchFamily="34" charset="0"/>
+                <a:ea typeface="Calibri" pitchFamily="34" charset="-122"/>
+                <a:cs typeface="Calibri" pitchFamily="34" charset="-120"/>
+              </a:rPr>
+              <a:t>CC BY-SA 4.0 · Frank Juchim</a:t>
+            </a:r>
+            <a:endParaRPr lang="en-US" sz="1100" dirty="0"/>
+          </a:p>
+        </p:txBody>
+      </p:sp>
+      <p:sp>
+        <p:nvSpPr>
           <p:cNvPr id="25" name="Slide Number Placeholder 0"/>
           <p:cNvSpPr>
             <a:spLocks noGrp="1"/>
@@ -2450,6 +2489,45 @@
                 <a:cs typeface="Calibri" pitchFamily="34" charset="-120"/>
               </a:rPr>
               <a:t>Level 4 · Welt A · Endliche Automaten · gA und eA</a:t>
+            </a:r>
+            <a:endParaRPr lang="en-US" sz="1100" dirty="0"/>
+          </a:p>
+        </p:txBody>
+      </p:sp>
+      <p:sp>
+        <p:nvSpPr>
+          <p:cNvPr id="4" name="Text 1"/>
+          <p:cNvSpPr/>
+          <p:nvPr/>
+        </p:nvSpPr>
+        <p:spPr>
+          <a:xfrm>
+            <a:off x="7985455" y="6473952"/>
+            <a:ext cx="2926080" cy="274320"/>
+          </a:xfrm>
+          <a:prstGeom prst="rect">
+            <a:avLst/>
+          </a:prstGeom>
+          <a:noFill/>
+          <a:ln/>
+        </p:spPr>
+        <p:txBody>
+          <a:bodyPr wrap="square" lIns="0" tIns="0" rIns="0" bIns="0" rtlCol="0" anchor="ctr"/>
+          <a:lstStyle/>
+          <a:p>
+            <a:pPr algn="r" indent="0" marL="0">
+              <a:buNone/>
+            </a:pPr>
+            <a:r>
+              <a:rPr lang="en-US" sz="1100" dirty="0">
+                <a:solidFill>
+                  <a:srgbClr val="5B6770"/>
+                </a:solidFill>
+                <a:latin typeface="Calibri" pitchFamily="34" charset="0"/>
+                <a:ea typeface="Calibri" pitchFamily="34" charset="-122"/>
+                <a:cs typeface="Calibri" pitchFamily="34" charset="-120"/>
+              </a:rPr>
+              <a:t>CC BY-SA 4.0 · Frank Juchim</a:t>
             </a:r>
             <a:endParaRPr lang="en-US" sz="1100" dirty="0"/>
           </a:p>
